--- a/AWSシングルクラウドVer/docs/01_management/sprint2/証跡/Story3-6/アイコン.pptx
+++ b/AWSシングルクラウドVer/docs/01_management/sprint2/証跡/Story3-6/アイコン.pptx
@@ -175,7 +175,7 @@
 <file path=ppt/revisionInfo.xml><?xml version="1.0" encoding="utf-8"?>
 <p1510:revInfo xmlns:a="http://schemas.openxmlformats.org/drawingml/2006/main" xmlns:r="http://schemas.openxmlformats.org/officeDocument/2006/relationships" xmlns:p1510="http://schemas.microsoft.com/office/powerpoint/2015/10/main">
   <p1510:revLst>
-    <p1510:client id="{6315A46E-FFED-4705-A254-3C2A72DD12BA}" v="23" dt="2026-03-29T16:15:01.541"/>
+    <p1510:client id="{6315A46E-FFED-4705-A254-3C2A72DD12BA}" v="24" dt="2026-03-29T16:18:50.902"/>
   </p1510:revLst>
 </p1510:revInfo>
 </file>
@@ -185,7 +185,7 @@
   <pc:docChgLst>
     <pc:chgData name="Yuenong Mei(梅 月濃)" userId="e6685a25-1bc5-4a58-8438-cb63b0ea184f" providerId="ADAL" clId="{9EDEA3EC-83F1-4CFE-ACB3-67463D9BC2F6}"/>
     <pc:docChg chg="undo custSel addSld delSld modSld sldOrd addMainMaster delMainMaster modMainMaster delSection modSection">
-      <pc:chgData name="Yuenong Mei(梅 月濃)" userId="e6685a25-1bc5-4a58-8438-cb63b0ea184f" providerId="ADAL" clId="{9EDEA3EC-83F1-4CFE-ACB3-67463D9BC2F6}" dt="2026-03-29T16:15:14.313" v="482" actId="108"/>
+      <pc:chgData name="Yuenong Mei(梅 月濃)" userId="e6685a25-1bc5-4a58-8438-cb63b0ea184f" providerId="ADAL" clId="{9EDEA3EC-83F1-4CFE-ACB3-67463D9BC2F6}" dt="2026-03-29T16:19:14.202" v="500" actId="14100"/>
       <pc:docMkLst>
         <pc:docMk/>
       </pc:docMkLst>
@@ -612,8 +612,8 @@
           </ac:cxnSpMkLst>
         </pc:cxnChg>
       </pc:sldChg>
-      <pc:sldChg chg="addSp modSp add mod ord">
-        <pc:chgData name="Yuenong Mei(梅 月濃)" userId="e6685a25-1bc5-4a58-8438-cb63b0ea184f" providerId="ADAL" clId="{9EDEA3EC-83F1-4CFE-ACB3-67463D9BC2F6}" dt="2026-03-29T16:15:14.313" v="482" actId="108"/>
+      <pc:sldChg chg="addSp delSp modSp add mod ord">
+        <pc:chgData name="Yuenong Mei(梅 月濃)" userId="e6685a25-1bc5-4a58-8438-cb63b0ea184f" providerId="ADAL" clId="{9EDEA3EC-83F1-4CFE-ACB3-67463D9BC2F6}" dt="2026-03-29T16:19:14.202" v="500" actId="14100"/>
         <pc:sldMkLst>
           <pc:docMk/>
           <pc:sldMk cId="1528469775" sldId="274"/>
@@ -626,6 +626,22 @@
             <ac:spMk id="2" creationId="{FF45AB0A-3EEC-F496-1839-7D8EF5265226}"/>
           </ac:spMkLst>
         </pc:spChg>
+        <pc:spChg chg="add mod">
+          <ac:chgData name="Yuenong Mei(梅 月濃)" userId="e6685a25-1bc5-4a58-8438-cb63b0ea184f" providerId="ADAL" clId="{9EDEA3EC-83F1-4CFE-ACB3-67463D9BC2F6}" dt="2026-03-29T16:18:40.321" v="490" actId="14100"/>
+          <ac:spMkLst>
+            <pc:docMk/>
+            <pc:sldMk cId="1528469775" sldId="274"/>
+            <ac:spMk id="7" creationId="{75E05814-07A6-C4F8-B70B-53795C721CAB}"/>
+          </ac:spMkLst>
+        </pc:spChg>
+        <pc:spChg chg="add mod">
+          <ac:chgData name="Yuenong Mei(梅 月濃)" userId="e6685a25-1bc5-4a58-8438-cb63b0ea184f" providerId="ADAL" clId="{9EDEA3EC-83F1-4CFE-ACB3-67463D9BC2F6}" dt="2026-03-29T16:18:50.902" v="491" actId="571"/>
+          <ac:spMkLst>
+            <pc:docMk/>
+            <pc:sldMk cId="1528469775" sldId="274"/>
+            <ac:spMk id="8" creationId="{72CBFA1C-EB6E-0086-B669-836F819C4939}"/>
+          </ac:spMkLst>
+        </pc:spChg>
         <pc:grpChg chg="mod">
           <ac:chgData name="Yuenong Mei(梅 月濃)" userId="e6685a25-1bc5-4a58-8438-cb63b0ea184f" providerId="ADAL" clId="{9EDEA3EC-83F1-4CFE-ACB3-67463D9BC2F6}" dt="2026-03-29T16:15:08.595" v="480" actId="1076"/>
           <ac:grpSpMkLst>
@@ -634,14 +650,30 @@
             <ac:grpSpMk id="17" creationId="{77972C78-AA5A-4380-8146-15DD8B9BE62B}"/>
           </ac:grpSpMkLst>
         </pc:grpChg>
-        <pc:picChg chg="add mod">
-          <ac:chgData name="Yuenong Mei(梅 月濃)" userId="e6685a25-1bc5-4a58-8438-cb63b0ea184f" providerId="ADAL" clId="{9EDEA3EC-83F1-4CFE-ACB3-67463D9BC2F6}" dt="2026-03-29T16:15:14.313" v="482" actId="108"/>
+        <pc:picChg chg="add del mod">
+          <ac:chgData name="Yuenong Mei(梅 月濃)" userId="e6685a25-1bc5-4a58-8438-cb63b0ea184f" providerId="ADAL" clId="{9EDEA3EC-83F1-4CFE-ACB3-67463D9BC2F6}" dt="2026-03-29T16:18:14.484" v="483" actId="478"/>
           <ac:picMkLst>
             <pc:docMk/>
             <pc:sldMk cId="1528469775" sldId="274"/>
             <ac:picMk id="3" creationId="{CD79FF23-8A1C-6545-CCCC-B3DEE1AE682A}"/>
           </ac:picMkLst>
         </pc:picChg>
+        <pc:picChg chg="add mod">
+          <ac:chgData name="Yuenong Mei(梅 月濃)" userId="e6685a25-1bc5-4a58-8438-cb63b0ea184f" providerId="ADAL" clId="{9EDEA3EC-83F1-4CFE-ACB3-67463D9BC2F6}" dt="2026-03-29T16:19:14.202" v="500" actId="14100"/>
+          <ac:picMkLst>
+            <pc:docMk/>
+            <pc:sldMk cId="1528469775" sldId="274"/>
+            <ac:picMk id="11" creationId="{840517F9-5A91-605F-F149-11FBA983A910}"/>
+          </ac:picMkLst>
+        </pc:picChg>
+        <pc:cxnChg chg="add del">
+          <ac:chgData name="Yuenong Mei(梅 月濃)" userId="e6685a25-1bc5-4a58-8438-cb63b0ea184f" providerId="ADAL" clId="{9EDEA3EC-83F1-4CFE-ACB3-67463D9BC2F6}" dt="2026-03-29T16:18:27.064" v="485" actId="478"/>
+          <ac:cxnSpMkLst>
+            <pc:docMk/>
+            <pc:sldMk cId="1528469775" sldId="274"/>
+            <ac:cxnSpMk id="6" creationId="{67C5E8EE-B459-0D1E-9D38-9CA542247C9E}"/>
+          </ac:cxnSpMkLst>
+        </pc:cxnChg>
       </pc:sldChg>
       <pc:sldChg chg="add ord">
         <pc:chgData name="Yuenong Mei(梅 月濃)" userId="e6685a25-1bc5-4a58-8438-cb63b0ea184f" providerId="ADAL" clId="{9EDEA3EC-83F1-4CFE-ACB3-67463D9BC2F6}" dt="2026-03-29T16:10:03.547" v="290"/>
@@ -11305,12 +11337,116 @@
           </p:sp>
         </p:grpSp>
       </p:grpSp>
+      <p:sp>
+        <p:nvSpPr>
+          <p:cNvPr id="7" name="正方形/長方形 6">
+            <a:extLst>
+              <a:ext uri="{FF2B5EF4-FFF2-40B4-BE49-F238E27FC236}">
+                <a16:creationId xmlns:a16="http://schemas.microsoft.com/office/drawing/2014/main" id="{75E05814-07A6-C4F8-B70B-53795C721CAB}"/>
+              </a:ext>
+            </a:extLst>
+          </p:cNvPr>
+          <p:cNvSpPr/>
+          <p:nvPr/>
+        </p:nvSpPr>
+        <p:spPr>
+          <a:xfrm>
+            <a:off x="322484" y="1635645"/>
+            <a:ext cx="4102263" cy="3024309"/>
+          </a:xfrm>
+          <a:prstGeom prst="rect">
+            <a:avLst/>
+          </a:prstGeom>
+          <a:solidFill>
+            <a:schemeClr val="bg1"/>
+          </a:solidFill>
+          <a:ln w="19050">
+            <a:solidFill>
+              <a:schemeClr val="accent1"/>
+            </a:solidFill>
+          </a:ln>
+        </p:spPr>
+        <p:style>
+          <a:lnRef idx="1">
+            <a:schemeClr val="accent1"/>
+          </a:lnRef>
+          <a:fillRef idx="0">
+            <a:schemeClr val="accent1"/>
+          </a:fillRef>
+          <a:effectRef idx="0">
+            <a:schemeClr val="accent1"/>
+          </a:effectRef>
+          <a:fontRef idx="minor">
+            <a:schemeClr val="tx1"/>
+          </a:fontRef>
+        </p:style>
+        <p:txBody>
+          <a:bodyPr rtlCol="0" anchor="ctr"/>
+          <a:lstStyle/>
+          <a:p>
+            <a:pPr algn="ctr"/>
+            <a:endParaRPr kumimoji="1" lang="ja-JP" altLang="en-US" dirty="0"/>
+          </a:p>
+        </p:txBody>
+      </p:sp>
+      <p:sp>
+        <p:nvSpPr>
+          <p:cNvPr id="8" name="正方形/長方形 7">
+            <a:extLst>
+              <a:ext uri="{FF2B5EF4-FFF2-40B4-BE49-F238E27FC236}">
+                <a16:creationId xmlns:a16="http://schemas.microsoft.com/office/drawing/2014/main" id="{72CBFA1C-EB6E-0086-B669-836F819C4939}"/>
+              </a:ext>
+            </a:extLst>
+          </p:cNvPr>
+          <p:cNvSpPr/>
+          <p:nvPr/>
+        </p:nvSpPr>
+        <p:spPr>
+          <a:xfrm>
+            <a:off x="4719253" y="1635645"/>
+            <a:ext cx="4102263" cy="3024309"/>
+          </a:xfrm>
+          <a:prstGeom prst="rect">
+            <a:avLst/>
+          </a:prstGeom>
+          <a:solidFill>
+            <a:schemeClr val="bg1"/>
+          </a:solidFill>
+          <a:ln w="19050">
+            <a:solidFill>
+              <a:schemeClr val="accent1"/>
+            </a:solidFill>
+          </a:ln>
+        </p:spPr>
+        <p:style>
+          <a:lnRef idx="1">
+            <a:schemeClr val="accent1"/>
+          </a:lnRef>
+          <a:fillRef idx="0">
+            <a:schemeClr val="accent1"/>
+          </a:fillRef>
+          <a:effectRef idx="0">
+            <a:schemeClr val="accent1"/>
+          </a:effectRef>
+          <a:fontRef idx="minor">
+            <a:schemeClr val="tx1"/>
+          </a:fontRef>
+        </p:style>
+        <p:txBody>
+          <a:bodyPr rtlCol="0" anchor="ctr"/>
+          <a:lstStyle/>
+          <a:p>
+            <a:pPr algn="ctr"/>
+            <a:endParaRPr kumimoji="1" lang="ja-JP" altLang="en-US" dirty="0"/>
+          </a:p>
+        </p:txBody>
+      </p:sp>
       <p:pic>
         <p:nvPicPr>
-          <p:cNvPr id="3" name="図 2">
-            <a:extLst>
-              <a:ext uri="{FF2B5EF4-FFF2-40B4-BE49-F238E27FC236}">
-                <a16:creationId xmlns:a16="http://schemas.microsoft.com/office/drawing/2014/main" id="{CD79FF23-8A1C-6545-CCCC-B3DEE1AE682A}"/>
+          <p:cNvPr id="11" name="図 10">
+            <a:extLst>
+              <a:ext uri="{FF2B5EF4-FFF2-40B4-BE49-F238E27FC236}">
+                <a16:creationId xmlns:a16="http://schemas.microsoft.com/office/drawing/2014/main" id="{840517F9-5A91-605F-F149-11FBA983A910}"/>
               </a:ext>
             </a:extLst>
           </p:cNvPr>
@@ -11320,15 +11456,21 @@
           <p:nvPr/>
         </p:nvPicPr>
         <p:blipFill>
-          <a:blip r:embed="rId2"/>
+          <a:blip r:embed="rId2">
+            <a:extLst>
+              <a:ext uri="{28A0092B-C50C-407E-A947-70E740481C1C}">
+                <a14:useLocalDpi xmlns:a14="http://schemas.microsoft.com/office/drawing/2010/main" val="0"/>
+              </a:ext>
+            </a:extLst>
+          </a:blip>
           <a:stretch>
             <a:fillRect/>
           </a:stretch>
         </p:blipFill>
         <p:spPr>
           <a:xfrm>
-            <a:off x="780699" y="1579191"/>
-            <a:ext cx="3185831" cy="3190793"/>
+            <a:off x="4719253" y="1635644"/>
+            <a:ext cx="4102263" cy="3506141"/>
           </a:xfrm>
           <a:prstGeom prst="rect">
             <a:avLst/>

--- a/AWSシングルクラウドVer/docs/01_management/sprint2/証跡/Story3-6/アイコン.pptx
+++ b/AWSシングルクラウドVer/docs/01_management/sprint2/証跡/Story3-6/アイコン.pptx
@@ -185,7 +185,7 @@
   <pc:docChgLst>
     <pc:chgData name="Yuenong Mei(梅 月濃)" userId="e6685a25-1bc5-4a58-8438-cb63b0ea184f" providerId="ADAL" clId="{9EDEA3EC-83F1-4CFE-ACB3-67463D9BC2F6}"/>
     <pc:docChg chg="undo custSel addSld delSld modSld sldOrd addMainMaster delMainMaster modMainMaster delSection modSection">
-      <pc:chgData name="Yuenong Mei(梅 月濃)" userId="e6685a25-1bc5-4a58-8438-cb63b0ea184f" providerId="ADAL" clId="{9EDEA3EC-83F1-4CFE-ACB3-67463D9BC2F6}" dt="2026-03-29T16:19:14.202" v="500" actId="14100"/>
+      <pc:chgData name="Yuenong Mei(梅 月濃)" userId="e6685a25-1bc5-4a58-8438-cb63b0ea184f" providerId="ADAL" clId="{9EDEA3EC-83F1-4CFE-ACB3-67463D9BC2F6}" dt="2026-03-29T16:19:19.593" v="503" actId="478"/>
       <pc:docMkLst>
         <pc:docMk/>
       </pc:docMkLst>
@@ -613,7 +613,7 @@
         </pc:cxnChg>
       </pc:sldChg>
       <pc:sldChg chg="addSp delSp modSp add mod ord">
-        <pc:chgData name="Yuenong Mei(梅 月濃)" userId="e6685a25-1bc5-4a58-8438-cb63b0ea184f" providerId="ADAL" clId="{9EDEA3EC-83F1-4CFE-ACB3-67463D9BC2F6}" dt="2026-03-29T16:19:14.202" v="500" actId="14100"/>
+        <pc:chgData name="Yuenong Mei(梅 月濃)" userId="e6685a25-1bc5-4a58-8438-cb63b0ea184f" providerId="ADAL" clId="{9EDEA3EC-83F1-4CFE-ACB3-67463D9BC2F6}" dt="2026-03-29T16:19:19.593" v="503" actId="478"/>
         <pc:sldMkLst>
           <pc:docMk/>
           <pc:sldMk cId="1528469775" sldId="274"/>
@@ -634,8 +634,8 @@
             <ac:spMk id="7" creationId="{75E05814-07A6-C4F8-B70B-53795C721CAB}"/>
           </ac:spMkLst>
         </pc:spChg>
-        <pc:spChg chg="add mod">
-          <ac:chgData name="Yuenong Mei(梅 月濃)" userId="e6685a25-1bc5-4a58-8438-cb63b0ea184f" providerId="ADAL" clId="{9EDEA3EC-83F1-4CFE-ACB3-67463D9BC2F6}" dt="2026-03-29T16:18:50.902" v="491" actId="571"/>
+        <pc:spChg chg="add del mod">
+          <ac:chgData name="Yuenong Mei(梅 月濃)" userId="e6685a25-1bc5-4a58-8438-cb63b0ea184f" providerId="ADAL" clId="{9EDEA3EC-83F1-4CFE-ACB3-67463D9BC2F6}" dt="2026-03-29T16:19:19.593" v="503" actId="478"/>
           <ac:spMkLst>
             <pc:docMk/>
             <pc:sldMk cId="1528469775" sldId="274"/>
@@ -659,7 +659,7 @@
           </ac:picMkLst>
         </pc:picChg>
         <pc:picChg chg="add mod">
-          <ac:chgData name="Yuenong Mei(梅 月濃)" userId="e6685a25-1bc5-4a58-8438-cb63b0ea184f" providerId="ADAL" clId="{9EDEA3EC-83F1-4CFE-ACB3-67463D9BC2F6}" dt="2026-03-29T16:19:14.202" v="500" actId="14100"/>
+          <ac:chgData name="Yuenong Mei(梅 月濃)" userId="e6685a25-1bc5-4a58-8438-cb63b0ea184f" providerId="ADAL" clId="{9EDEA3EC-83F1-4CFE-ACB3-67463D9BC2F6}" dt="2026-03-29T16:19:18.229" v="502" actId="1076"/>
           <ac:picMkLst>
             <pc:docMk/>
             <pc:sldMk cId="1528469775" sldId="274"/>
@@ -11389,58 +11389,6 @@
           </a:p>
         </p:txBody>
       </p:sp>
-      <p:sp>
-        <p:nvSpPr>
-          <p:cNvPr id="8" name="正方形/長方形 7">
-            <a:extLst>
-              <a:ext uri="{FF2B5EF4-FFF2-40B4-BE49-F238E27FC236}">
-                <a16:creationId xmlns:a16="http://schemas.microsoft.com/office/drawing/2014/main" id="{72CBFA1C-EB6E-0086-B669-836F819C4939}"/>
-              </a:ext>
-            </a:extLst>
-          </p:cNvPr>
-          <p:cNvSpPr/>
-          <p:nvPr/>
-        </p:nvSpPr>
-        <p:spPr>
-          <a:xfrm>
-            <a:off x="4719253" y="1635645"/>
-            <a:ext cx="4102263" cy="3024309"/>
-          </a:xfrm>
-          <a:prstGeom prst="rect">
-            <a:avLst/>
-          </a:prstGeom>
-          <a:solidFill>
-            <a:schemeClr val="bg1"/>
-          </a:solidFill>
-          <a:ln w="19050">
-            <a:solidFill>
-              <a:schemeClr val="accent1"/>
-            </a:solidFill>
-          </a:ln>
-        </p:spPr>
-        <p:style>
-          <a:lnRef idx="1">
-            <a:schemeClr val="accent1"/>
-          </a:lnRef>
-          <a:fillRef idx="0">
-            <a:schemeClr val="accent1"/>
-          </a:fillRef>
-          <a:effectRef idx="0">
-            <a:schemeClr val="accent1"/>
-          </a:effectRef>
-          <a:fontRef idx="minor">
-            <a:schemeClr val="tx1"/>
-          </a:fontRef>
-        </p:style>
-        <p:txBody>
-          <a:bodyPr rtlCol="0" anchor="ctr"/>
-          <a:lstStyle/>
-          <a:p>
-            <a:pPr algn="ctr"/>
-            <a:endParaRPr kumimoji="1" lang="ja-JP" altLang="en-US" dirty="0"/>
-          </a:p>
-        </p:txBody>
-      </p:sp>
       <p:pic>
         <p:nvPicPr>
           <p:cNvPr id="11" name="図 10">
@@ -11469,8 +11417,8 @@
         </p:blipFill>
         <p:spPr>
           <a:xfrm>
-            <a:off x="4719253" y="1635644"/>
-            <a:ext cx="4102263" cy="3506141"/>
+            <a:off x="4899794" y="1635645"/>
+            <a:ext cx="3741179" cy="3197528"/>
           </a:xfrm>
           <a:prstGeom prst="rect">
             <a:avLst/>
